--- a/src/HackEDI.pptx
+++ b/src/HackEDI.pptx
@@ -5,11 +5,13 @@
     <p:sldMasterId id="2147483648" r:id="rId1"/>
   </p:sldMasterIdLst>
   <p:notesMasterIdLst>
-    <p:notesMasterId r:id="rId4"/>
+    <p:notesMasterId r:id="rId6"/>
   </p:notesMasterIdLst>
   <p:sldIdLst>
     <p:sldId id="256" r:id="rId2"/>
     <p:sldId id="2563" r:id="rId3"/>
+    <p:sldId id="2564" r:id="rId4"/>
+    <p:sldId id="2565" r:id="rId5"/>
   </p:sldIdLst>
   <p:sldSz cx="12192000" cy="6858000"/>
   <p:notesSz cx="6858000" cy="9144000"/>
@@ -4573,6 +4575,191 @@
       <p:bldP spid="5" grpId="0"/>
     </p:bldLst>
   </p:timing>
+</p:sld>
+</file>
+
+<file path=ppt/slides/slide3.xml><?xml version="1.0" encoding="utf-8"?>
+<p:sld xmlns:a="http://schemas.openxmlformats.org/drawingml/2006/main" xmlns:r="http://schemas.openxmlformats.org/officeDocument/2006/relationships" xmlns:p="http://schemas.openxmlformats.org/presentationml/2006/main">
+  <p:cSld>
+    <p:spTree>
+      <p:nvGrpSpPr>
+        <p:cNvPr id="1" name=""/>
+        <p:cNvGrpSpPr/>
+        <p:nvPr/>
+      </p:nvGrpSpPr>
+      <p:grpSpPr>
+        <a:xfrm>
+          <a:off x="0" y="0"/>
+          <a:ext cx="0" cy="0"/>
+          <a:chOff x="0" y="0"/>
+          <a:chExt cx="0" cy="0"/>
+        </a:xfrm>
+      </p:grpSpPr>
+      <p:sp>
+        <p:nvSpPr>
+          <p:cNvPr id="2" name="Title 1">
+            <a:extLst>
+              <a:ext uri="{FF2B5EF4-FFF2-40B4-BE49-F238E27FC236}">
+                <a16:creationId xmlns:a16="http://schemas.microsoft.com/office/drawing/2014/main" id="{4E720FD9-DDE9-CBCC-6FC4-9352351BC092}"/>
+              </a:ext>
+            </a:extLst>
+          </p:cNvPr>
+          <p:cNvSpPr>
+            <a:spLocks noGrp="1"/>
+          </p:cNvSpPr>
+          <p:nvPr>
+            <p:ph type="title"/>
+          </p:nvPr>
+        </p:nvSpPr>
+        <p:spPr/>
+        <p:txBody>
+          <a:bodyPr/>
+          <a:lstStyle/>
+          <a:p>
+            <a:r>
+              <a:rPr lang="en-US" dirty="0"/>
+              <a:t>MCP Architecture</a:t>
+            </a:r>
+          </a:p>
+        </p:txBody>
+      </p:sp>
+      <p:pic>
+        <p:nvPicPr>
+          <p:cNvPr id="5" name="Content Placeholder 4">
+            <a:extLst>
+              <a:ext uri="{FF2B5EF4-FFF2-40B4-BE49-F238E27FC236}">
+                <a16:creationId xmlns:a16="http://schemas.microsoft.com/office/drawing/2014/main" id="{131889B3-ABB5-3C20-1757-B89489AA3A13}"/>
+              </a:ext>
+            </a:extLst>
+          </p:cNvPr>
+          <p:cNvPicPr>
+            <a:picLocks noGrp="1" noChangeAspect="1"/>
+          </p:cNvPicPr>
+          <p:nvPr>
+            <p:ph sz="quarter" idx="14"/>
+          </p:nvPr>
+        </p:nvPicPr>
+        <p:blipFill>
+          <a:blip r:embed="rId2"/>
+          <a:stretch>
+            <a:fillRect/>
+          </a:stretch>
+        </p:blipFill>
+        <p:spPr>
+          <a:xfrm>
+            <a:off x="1742422" y="1770952"/>
+            <a:ext cx="9140731" cy="4291332"/>
+          </a:xfrm>
+          <a:prstGeom prst="rect">
+            <a:avLst/>
+          </a:prstGeom>
+        </p:spPr>
+      </p:pic>
+    </p:spTree>
+    <p:extLst>
+      <p:ext uri="{BB962C8B-B14F-4D97-AF65-F5344CB8AC3E}">
+        <p14:creationId xmlns:p14="http://schemas.microsoft.com/office/powerpoint/2010/main" val="2380911096"/>
+      </p:ext>
+    </p:extLst>
+  </p:cSld>
+  <p:clrMapOvr>
+    <a:masterClrMapping/>
+  </p:clrMapOvr>
+</p:sld>
+</file>
+
+<file path=ppt/slides/slide4.xml><?xml version="1.0" encoding="utf-8"?>
+<p:sld xmlns:a="http://schemas.openxmlformats.org/drawingml/2006/main" xmlns:r="http://schemas.openxmlformats.org/officeDocument/2006/relationships" xmlns:p="http://schemas.openxmlformats.org/presentationml/2006/main">
+  <p:cSld>
+    <p:spTree>
+      <p:nvGrpSpPr>
+        <p:cNvPr id="1" name=""/>
+        <p:cNvGrpSpPr/>
+        <p:nvPr/>
+      </p:nvGrpSpPr>
+      <p:grpSpPr>
+        <a:xfrm>
+          <a:off x="0" y="0"/>
+          <a:ext cx="0" cy="0"/>
+          <a:chOff x="0" y="0"/>
+          <a:chExt cx="0" cy="0"/>
+        </a:xfrm>
+      </p:grpSpPr>
+      <p:sp>
+        <p:nvSpPr>
+          <p:cNvPr id="2" name="Title 1">
+            <a:extLst>
+              <a:ext uri="{FF2B5EF4-FFF2-40B4-BE49-F238E27FC236}">
+                <a16:creationId xmlns:a16="http://schemas.microsoft.com/office/drawing/2014/main" id="{CABB2DC9-EFD2-74E2-0288-88E3CEB60E6D}"/>
+              </a:ext>
+            </a:extLst>
+          </p:cNvPr>
+          <p:cNvSpPr>
+            <a:spLocks noGrp="1"/>
+          </p:cNvSpPr>
+          <p:nvPr>
+            <p:ph type="title"/>
+          </p:nvPr>
+        </p:nvSpPr>
+        <p:spPr/>
+        <p:txBody>
+          <a:bodyPr/>
+          <a:lstStyle/>
+          <a:p>
+            <a:r>
+              <a:rPr lang="en-US" dirty="0"/>
+              <a:t> </a:t>
+            </a:r>
+            <a:r>
+              <a:rPr lang="en-US" sz="4800" dirty="0"/>
+              <a:t>Draft UI</a:t>
+            </a:r>
+            <a:endParaRPr lang="en-US" dirty="0"/>
+          </a:p>
+        </p:txBody>
+      </p:sp>
+      <p:pic>
+        <p:nvPicPr>
+          <p:cNvPr id="5" name="Content Placeholder 4">
+            <a:extLst>
+              <a:ext uri="{FF2B5EF4-FFF2-40B4-BE49-F238E27FC236}">
+                <a16:creationId xmlns:a16="http://schemas.microsoft.com/office/drawing/2014/main" id="{F20C00D5-E32D-39AD-BFB2-01BD40E1F2A9}"/>
+              </a:ext>
+            </a:extLst>
+          </p:cNvPr>
+          <p:cNvPicPr>
+            <a:picLocks noGrp="1" noChangeAspect="1"/>
+          </p:cNvPicPr>
+          <p:nvPr>
+            <p:ph sz="quarter" idx="14"/>
+          </p:nvPr>
+        </p:nvPicPr>
+        <p:blipFill>
+          <a:blip r:embed="rId2"/>
+          <a:stretch>
+            <a:fillRect/>
+          </a:stretch>
+        </p:blipFill>
+        <p:spPr>
+          <a:xfrm>
+            <a:off x="182563" y="1228328"/>
+            <a:ext cx="11350553" cy="4473225"/>
+          </a:xfrm>
+          <a:prstGeom prst="rect">
+            <a:avLst/>
+          </a:prstGeom>
+        </p:spPr>
+      </p:pic>
+    </p:spTree>
+    <p:extLst>
+      <p:ext uri="{BB962C8B-B14F-4D97-AF65-F5344CB8AC3E}">
+        <p14:creationId xmlns:p14="http://schemas.microsoft.com/office/powerpoint/2010/main" val="655767171"/>
+      </p:ext>
+    </p:extLst>
+  </p:cSld>
+  <p:clrMapOvr>
+    <a:masterClrMapping/>
+  </p:clrMapOvr>
 </p:sld>
 </file>
 
